--- a/MODS/DeepslateDungeons/Model/title.pptx
+++ b/MODS/DeepslateDungeons/Model/title.pptx
@@ -2,12 +2,12 @@
 <file path=ppt/presentation.xml><?xml version="1.0" encoding="utf-8"?>
 <p:presentation xmlns:a="http://schemas.openxmlformats.org/drawingml/2006/main" xmlns:r="http://schemas.openxmlformats.org/officeDocument/2006/relationships" xmlns:p="http://schemas.openxmlformats.org/presentationml/2006/main" saveSubsetFonts="1">
   <p:sldMasterIdLst>
-    <p:sldMasterId id="2147483744" r:id="rId1"/>
+    <p:sldMasterId id="2147483768" r:id="rId1"/>
   </p:sldMasterIdLst>
   <p:sldIdLst>
     <p:sldId id="256" r:id="rId2"/>
   </p:sldIdLst>
-  <p:sldSz cx="18000663" cy="2879725"/>
+  <p:sldSz cx="16559213" cy="2879725"/>
   <p:notesSz cx="6858000" cy="9144000"/>
   <p:defaultTextStyle>
     <a:defPPr>
@@ -141,8 +141,8 @@
         </p:nvSpPr>
         <p:spPr>
           <a:xfrm>
-            <a:off x="2250083" y="471289"/>
-            <a:ext cx="13500497" cy="1002571"/>
+            <a:off x="2069902" y="471289"/>
+            <a:ext cx="12419410" cy="1002571"/>
           </a:xfrm>
         </p:spPr>
         <p:txBody>
@@ -173,8 +173,8 @@
         </p:nvSpPr>
         <p:spPr>
           <a:xfrm>
-            <a:off x="2250083" y="1512522"/>
-            <a:ext cx="13500497" cy="695267"/>
+            <a:off x="2069902" y="1512522"/>
+            <a:ext cx="12419410" cy="695267"/>
           </a:xfrm>
         </p:spPr>
         <p:txBody>
@@ -294,7 +294,7 @@
     </p:spTree>
     <p:extLst>
       <p:ext uri="{BB962C8B-B14F-4D97-AF65-F5344CB8AC3E}">
-        <p14:creationId xmlns:p14="http://schemas.microsoft.com/office/powerpoint/2010/main" val="1100158818"/>
+        <p14:creationId xmlns:p14="http://schemas.microsoft.com/office/powerpoint/2010/main" val="1120139123"/>
       </p:ext>
     </p:extLst>
   </p:cSld>
@@ -464,7 +464,7 @@
     </p:spTree>
     <p:extLst>
       <p:ext uri="{BB962C8B-B14F-4D97-AF65-F5344CB8AC3E}">
-        <p14:creationId xmlns:p14="http://schemas.microsoft.com/office/powerpoint/2010/main" val="4091563525"/>
+        <p14:creationId xmlns:p14="http://schemas.microsoft.com/office/powerpoint/2010/main" val="3856084982"/>
       </p:ext>
     </p:extLst>
   </p:cSld>
@@ -503,8 +503,8 @@
         </p:nvSpPr>
         <p:spPr>
           <a:xfrm>
-            <a:off x="12881724" y="153319"/>
-            <a:ext cx="3881393" cy="2440434"/>
+            <a:off x="11850187" y="153319"/>
+            <a:ext cx="3570580" cy="2440434"/>
           </a:xfrm>
         </p:spPr>
         <p:txBody>
@@ -531,8 +531,8 @@
         </p:nvSpPr>
         <p:spPr>
           <a:xfrm>
-            <a:off x="1237545" y="153319"/>
-            <a:ext cx="11419171" cy="2440434"/>
+            <a:off x="1138446" y="153319"/>
+            <a:ext cx="10504751" cy="2440434"/>
           </a:xfrm>
         </p:spPr>
         <p:txBody>
@@ -644,7 +644,7 @@
     </p:spTree>
     <p:extLst>
       <p:ext uri="{BB962C8B-B14F-4D97-AF65-F5344CB8AC3E}">
-        <p14:creationId xmlns:p14="http://schemas.microsoft.com/office/powerpoint/2010/main" val="2077628475"/>
+        <p14:creationId xmlns:p14="http://schemas.microsoft.com/office/powerpoint/2010/main" val="90544332"/>
       </p:ext>
     </p:extLst>
   </p:cSld>
@@ -814,7 +814,7 @@
     </p:spTree>
     <p:extLst>
       <p:ext uri="{BB962C8B-B14F-4D97-AF65-F5344CB8AC3E}">
-        <p14:creationId xmlns:p14="http://schemas.microsoft.com/office/powerpoint/2010/main" val="1513746156"/>
+        <p14:creationId xmlns:p14="http://schemas.microsoft.com/office/powerpoint/2010/main" val="3629145514"/>
       </p:ext>
     </p:extLst>
   </p:cSld>
@@ -853,8 +853,8 @@
         </p:nvSpPr>
         <p:spPr>
           <a:xfrm>
-            <a:off x="1228170" y="717932"/>
-            <a:ext cx="15525572" cy="1197885"/>
+            <a:off x="1129821" y="717932"/>
+            <a:ext cx="14282321" cy="1197885"/>
           </a:xfrm>
         </p:spPr>
         <p:txBody>
@@ -885,8 +885,8 @@
         </p:nvSpPr>
         <p:spPr>
           <a:xfrm>
-            <a:off x="1228170" y="1927150"/>
-            <a:ext cx="15525572" cy="629940"/>
+            <a:off x="1129821" y="1927150"/>
+            <a:ext cx="14282321" cy="629940"/>
           </a:xfrm>
         </p:spPr>
         <p:txBody>
@@ -1060,7 +1060,7 @@
     </p:spTree>
     <p:extLst>
       <p:ext uri="{BB962C8B-B14F-4D97-AF65-F5344CB8AC3E}">
-        <p14:creationId xmlns:p14="http://schemas.microsoft.com/office/powerpoint/2010/main" val="3657115756"/>
+        <p14:creationId xmlns:p14="http://schemas.microsoft.com/office/powerpoint/2010/main" val="2766405740"/>
       </p:ext>
     </p:extLst>
   </p:cSld>
@@ -1122,8 +1122,8 @@
         </p:nvSpPr>
         <p:spPr>
           <a:xfrm>
-            <a:off x="1237545" y="766593"/>
-            <a:ext cx="7650282" cy="1827159"/>
+            <a:off x="1138446" y="766593"/>
+            <a:ext cx="7037666" cy="1827159"/>
           </a:xfrm>
         </p:spPr>
         <p:txBody>
@@ -1179,8 +1179,8 @@
         </p:nvSpPr>
         <p:spPr>
           <a:xfrm>
-            <a:off x="9112836" y="766593"/>
-            <a:ext cx="7650282" cy="1827159"/>
+            <a:off x="8383101" y="766593"/>
+            <a:ext cx="7037666" cy="1827159"/>
           </a:xfrm>
         </p:spPr>
         <p:txBody>
@@ -1292,7 +1292,7 @@
     </p:spTree>
     <p:extLst>
       <p:ext uri="{BB962C8B-B14F-4D97-AF65-F5344CB8AC3E}">
-        <p14:creationId xmlns:p14="http://schemas.microsoft.com/office/powerpoint/2010/main" val="2821701120"/>
+        <p14:creationId xmlns:p14="http://schemas.microsoft.com/office/powerpoint/2010/main" val="4000062701"/>
       </p:ext>
     </p:extLst>
   </p:cSld>
@@ -1331,8 +1331,8 @@
         </p:nvSpPr>
         <p:spPr>
           <a:xfrm>
-            <a:off x="1239890" y="153319"/>
-            <a:ext cx="15525572" cy="556614"/>
+            <a:off x="1140603" y="153319"/>
+            <a:ext cx="14282321" cy="556614"/>
           </a:xfrm>
         </p:spPr>
         <p:txBody>
@@ -1359,8 +1359,8 @@
         </p:nvSpPr>
         <p:spPr>
           <a:xfrm>
-            <a:off x="1239891" y="705933"/>
-            <a:ext cx="7615123" cy="345967"/>
+            <a:off x="1140603" y="705933"/>
+            <a:ext cx="7005323" cy="345967"/>
           </a:xfrm>
         </p:spPr>
         <p:txBody>
@@ -1424,8 +1424,8 @@
         </p:nvSpPr>
         <p:spPr>
           <a:xfrm>
-            <a:off x="1239891" y="1051899"/>
-            <a:ext cx="7615123" cy="1547186"/>
+            <a:off x="1140603" y="1051899"/>
+            <a:ext cx="7005323" cy="1547186"/>
           </a:xfrm>
         </p:spPr>
         <p:txBody>
@@ -1481,8 +1481,8 @@
         </p:nvSpPr>
         <p:spPr>
           <a:xfrm>
-            <a:off x="9112836" y="705933"/>
-            <a:ext cx="7652626" cy="345967"/>
+            <a:off x="8383102" y="705933"/>
+            <a:ext cx="7039822" cy="345967"/>
           </a:xfrm>
         </p:spPr>
         <p:txBody>
@@ -1546,8 +1546,8 @@
         </p:nvSpPr>
         <p:spPr>
           <a:xfrm>
-            <a:off x="9112836" y="1051899"/>
-            <a:ext cx="7652626" cy="1547186"/>
+            <a:off x="8383102" y="1051899"/>
+            <a:ext cx="7039822" cy="1547186"/>
           </a:xfrm>
         </p:spPr>
         <p:txBody>
@@ -1659,7 +1659,7 @@
     </p:spTree>
     <p:extLst>
       <p:ext uri="{BB962C8B-B14F-4D97-AF65-F5344CB8AC3E}">
-        <p14:creationId xmlns:p14="http://schemas.microsoft.com/office/powerpoint/2010/main" val="2699592364"/>
+        <p14:creationId xmlns:p14="http://schemas.microsoft.com/office/powerpoint/2010/main" val="930627430"/>
       </p:ext>
     </p:extLst>
   </p:cSld>
@@ -1777,7 +1777,7 @@
     </p:spTree>
     <p:extLst>
       <p:ext uri="{BB962C8B-B14F-4D97-AF65-F5344CB8AC3E}">
-        <p14:creationId xmlns:p14="http://schemas.microsoft.com/office/powerpoint/2010/main" val="3888822261"/>
+        <p14:creationId xmlns:p14="http://schemas.microsoft.com/office/powerpoint/2010/main" val="4079328898"/>
       </p:ext>
     </p:extLst>
   </p:cSld>
@@ -1872,7 +1872,7 @@
     </p:spTree>
     <p:extLst>
       <p:ext uri="{BB962C8B-B14F-4D97-AF65-F5344CB8AC3E}">
-        <p14:creationId xmlns:p14="http://schemas.microsoft.com/office/powerpoint/2010/main" val="2248990037"/>
+        <p14:creationId xmlns:p14="http://schemas.microsoft.com/office/powerpoint/2010/main" val="63052534"/>
       </p:ext>
     </p:extLst>
   </p:cSld>
@@ -1911,8 +1911,8 @@
         </p:nvSpPr>
         <p:spPr>
           <a:xfrm>
-            <a:off x="1239891" y="191982"/>
-            <a:ext cx="5805682" cy="671936"/>
+            <a:off x="1140603" y="191982"/>
+            <a:ext cx="5340777" cy="671936"/>
           </a:xfrm>
         </p:spPr>
         <p:txBody>
@@ -1943,8 +1943,8 @@
         </p:nvSpPr>
         <p:spPr>
           <a:xfrm>
-            <a:off x="7652626" y="414627"/>
-            <a:ext cx="9112836" cy="2046471"/>
+            <a:off x="7039822" y="414627"/>
+            <a:ext cx="8383102" cy="2046471"/>
           </a:xfrm>
         </p:spPr>
         <p:txBody>
@@ -2028,8 +2028,8 @@
         </p:nvSpPr>
         <p:spPr>
           <a:xfrm>
-            <a:off x="1239891" y="863918"/>
-            <a:ext cx="5805682" cy="1600514"/>
+            <a:off x="1140603" y="863918"/>
+            <a:ext cx="5340777" cy="1600514"/>
           </a:xfrm>
         </p:spPr>
         <p:txBody>
@@ -2149,7 +2149,7 @@
     </p:spTree>
     <p:extLst>
       <p:ext uri="{BB962C8B-B14F-4D97-AF65-F5344CB8AC3E}">
-        <p14:creationId xmlns:p14="http://schemas.microsoft.com/office/powerpoint/2010/main" val="2982601601"/>
+        <p14:creationId xmlns:p14="http://schemas.microsoft.com/office/powerpoint/2010/main" val="3439186276"/>
       </p:ext>
     </p:extLst>
   </p:cSld>
@@ -2188,8 +2188,8 @@
         </p:nvSpPr>
         <p:spPr>
           <a:xfrm>
-            <a:off x="1239891" y="191982"/>
-            <a:ext cx="5805682" cy="671936"/>
+            <a:off x="1140603" y="191982"/>
+            <a:ext cx="5340777" cy="671936"/>
           </a:xfrm>
         </p:spPr>
         <p:txBody>
@@ -2220,8 +2220,8 @@
         </p:nvSpPr>
         <p:spPr>
           <a:xfrm>
-            <a:off x="7652626" y="414627"/>
-            <a:ext cx="9112836" cy="2046471"/>
+            <a:off x="7039822" y="414627"/>
+            <a:ext cx="8383102" cy="2046471"/>
           </a:xfrm>
         </p:spPr>
         <p:txBody>
@@ -2285,8 +2285,8 @@
         </p:nvSpPr>
         <p:spPr>
           <a:xfrm>
-            <a:off x="1239891" y="863918"/>
-            <a:ext cx="5805682" cy="1600514"/>
+            <a:off x="1140603" y="863918"/>
+            <a:ext cx="5340777" cy="1600514"/>
           </a:xfrm>
         </p:spPr>
         <p:txBody>
@@ -2406,7 +2406,7 @@
     </p:spTree>
     <p:extLst>
       <p:ext uri="{BB962C8B-B14F-4D97-AF65-F5344CB8AC3E}">
-        <p14:creationId xmlns:p14="http://schemas.microsoft.com/office/powerpoint/2010/main" val="2051387106"/>
+        <p14:creationId xmlns:p14="http://schemas.microsoft.com/office/powerpoint/2010/main" val="3646266223"/>
       </p:ext>
     </p:extLst>
   </p:cSld>
@@ -2450,8 +2450,8 @@
         </p:nvSpPr>
         <p:spPr>
           <a:xfrm>
-            <a:off x="1237546" y="153319"/>
-            <a:ext cx="15525572" cy="556614"/>
+            <a:off x="1138446" y="153319"/>
+            <a:ext cx="14282321" cy="556614"/>
           </a:xfrm>
           <a:prstGeom prst="rect">
             <a:avLst/>
@@ -2483,8 +2483,8 @@
         </p:nvSpPr>
         <p:spPr>
           <a:xfrm>
-            <a:off x="1237546" y="766593"/>
-            <a:ext cx="15525572" cy="1827159"/>
+            <a:off x="1138446" y="766593"/>
+            <a:ext cx="14282321" cy="1827159"/>
           </a:xfrm>
           <a:prstGeom prst="rect">
             <a:avLst/>
@@ -2545,8 +2545,8 @@
         </p:nvSpPr>
         <p:spPr>
           <a:xfrm>
-            <a:off x="1237546" y="2669079"/>
-            <a:ext cx="4050149" cy="153319"/>
+            <a:off x="1138446" y="2669079"/>
+            <a:ext cx="3725823" cy="153319"/>
           </a:xfrm>
           <a:prstGeom prst="rect">
             <a:avLst/>
@@ -2586,8 +2586,8 @@
         </p:nvSpPr>
         <p:spPr>
           <a:xfrm>
-            <a:off x="5962720" y="2669079"/>
-            <a:ext cx="6075224" cy="153319"/>
+            <a:off x="5485240" y="2669079"/>
+            <a:ext cx="5588734" cy="153319"/>
           </a:xfrm>
           <a:prstGeom prst="rect">
             <a:avLst/>
@@ -2623,8 +2623,8 @@
         </p:nvSpPr>
         <p:spPr>
           <a:xfrm>
-            <a:off x="12712968" y="2669079"/>
-            <a:ext cx="4050149" cy="153319"/>
+            <a:off x="11694944" y="2669079"/>
+            <a:ext cx="3725823" cy="153319"/>
           </a:xfrm>
           <a:prstGeom prst="rect">
             <a:avLst/>
@@ -2655,23 +2655,23 @@
     </p:spTree>
     <p:extLst>
       <p:ext uri="{BB962C8B-B14F-4D97-AF65-F5344CB8AC3E}">
-        <p14:creationId xmlns:p14="http://schemas.microsoft.com/office/powerpoint/2010/main" val="1982711468"/>
+        <p14:creationId xmlns:p14="http://schemas.microsoft.com/office/powerpoint/2010/main" val="2507965645"/>
       </p:ext>
     </p:extLst>
   </p:cSld>
   <p:clrMap bg1="lt1" tx1="dk1" bg2="lt2" tx2="dk2" accent1="accent1" accent2="accent2" accent3="accent3" accent4="accent4" accent5="accent5" accent6="accent6" hlink="hlink" folHlink="folHlink"/>
   <p:sldLayoutIdLst>
-    <p:sldLayoutId id="2147483745" r:id="rId1"/>
-    <p:sldLayoutId id="2147483746" r:id="rId2"/>
-    <p:sldLayoutId id="2147483747" r:id="rId3"/>
-    <p:sldLayoutId id="2147483748" r:id="rId4"/>
-    <p:sldLayoutId id="2147483749" r:id="rId5"/>
-    <p:sldLayoutId id="2147483750" r:id="rId6"/>
-    <p:sldLayoutId id="2147483751" r:id="rId7"/>
-    <p:sldLayoutId id="2147483752" r:id="rId8"/>
-    <p:sldLayoutId id="2147483753" r:id="rId9"/>
-    <p:sldLayoutId id="2147483754" r:id="rId10"/>
-    <p:sldLayoutId id="2147483755" r:id="rId11"/>
+    <p:sldLayoutId id="2147483769" r:id="rId1"/>
+    <p:sldLayoutId id="2147483770" r:id="rId2"/>
+    <p:sldLayoutId id="2147483771" r:id="rId3"/>
+    <p:sldLayoutId id="2147483772" r:id="rId4"/>
+    <p:sldLayoutId id="2147483773" r:id="rId5"/>
+    <p:sldLayoutId id="2147483774" r:id="rId6"/>
+    <p:sldLayoutId id="2147483775" r:id="rId7"/>
+    <p:sldLayoutId id="2147483776" r:id="rId8"/>
+    <p:sldLayoutId id="2147483777" r:id="rId9"/>
+    <p:sldLayoutId id="2147483778" r:id="rId10"/>
+    <p:sldLayoutId id="2147483779" r:id="rId11"/>
   </p:sldLayoutIdLst>
   <p:txStyles>
     <p:titleStyle>
@@ -2998,8 +2998,8 @@
         </p:nvSpPr>
         <p:spPr>
           <a:xfrm>
-            <a:off x="0" y="0"/>
-            <a:ext cx="18000663" cy="2879725"/>
+            <a:off x="1" y="3"/>
+            <a:ext cx="16559214" cy="2879725"/>
           </a:xfrm>
           <a:prstGeom prst="rect">
             <a:avLst/>
@@ -3048,10 +3048,10 @@
         </p:nvGrpSpPr>
         <p:grpSpPr>
           <a:xfrm>
-            <a:off x="1798320" y="257174"/>
-            <a:ext cx="15151968" cy="2365376"/>
+            <a:off x="1077596" y="257175"/>
+            <a:ext cx="15255296" cy="2365376"/>
             <a:chOff x="1638049" y="257175"/>
-            <a:chExt cx="15373199" cy="2365376"/>
+            <a:chExt cx="15478036" cy="2365376"/>
           </a:xfrm>
         </p:grpSpPr>
         <p:sp>
@@ -3069,7 +3069,7 @@
           <p:spPr>
             <a:xfrm>
               <a:off x="1638049" y="655032"/>
-              <a:ext cx="6322565" cy="1569660"/>
+              <a:ext cx="6414880" cy="1569660"/>
             </a:xfrm>
             <a:prstGeom prst="rect">
               <a:avLst/>
@@ -3170,7 +3170,7 @@
           <p:spPr>
             <a:xfrm>
               <a:off x="9831077" y="655032"/>
-              <a:ext cx="7180171" cy="1569660"/>
+              <a:ext cx="7285008" cy="1569660"/>
             </a:xfrm>
             <a:prstGeom prst="rect">
               <a:avLst/>
